--- a/common/templates/实验汇报PPT模板.pptx
+++ b/common/templates/实验汇报PPT模板.pptx
@@ -2165,7 +2165,7 @@
                   <a:srgbClr val="555555"/>
                 </a:solidFill>
               </a:rPr>
-              <a:t>WingHui</a:t>
+              <a:t>ACOINFO</a:t>
             </a:r>
           </a:p>
           <a:p xmlns:a="http://schemas.openxmlformats.org/drawingml/2006/main">
